--- a/04-caso-integrador/slides/Caso Integrador - De los datos a la decisión - UDEM.pptx
+++ b/04-caso-integrador/slides/Caso Integrador - De los datos a la decisión - UDEM.pptx
@@ -5089,7 +5089,7 @@
                 </a:solidFill>
                 <a:latin typeface="Calibri"/>
               </a:rPr>
-              <a:t>•  Métricas internas</a:t>
+              <a:t>•  Silhouette</a:t>
             </a:r>
           </a:p>
           <a:p>
@@ -5105,7 +5105,7 @@
                 </a:solidFill>
                 <a:latin typeface="Calibri"/>
               </a:rPr>
-              <a:t>•  ARI si hay etiqueta</a:t>
+              <a:t>•  Tabla cruzada si hay etiqueta</a:t>
             </a:r>
           </a:p>
           <a:p>
@@ -6381,7 +6381,7 @@
                           </a:solidFill>
                           <a:latin typeface="Calibri"/>
                         </a:rPr>
-                        <a:t>Codo + silhouette, DB, CH</a:t>
+                        <a:t>Codo + silhouette</a:t>
                       </a:r>
                     </a:p>
                   </a:txBody>
@@ -7430,7 +7430,7 @@
                           </a:solidFill>
                           <a:latin typeface="Calibri"/>
                         </a:rPr>
-                        <a:t>Elegir k con una sola métrica</a:t>
+                        <a:t>Elegir k sólo con el codo</a:t>
                       </a:r>
                     </a:p>
                   </a:txBody>
@@ -7886,7 +7886,7 @@
                 </a:solidFill>
                 <a:latin typeface="Arial"/>
               </a:rPr>
-              <a:t>Métricas internas</a:t>
+              <a:t>Silhouette</a:t>
             </a:r>
           </a:p>
         </p:txBody>
@@ -7925,7 +7925,7 @@
                 </a:solidFill>
                 <a:latin typeface="Calibri"/>
               </a:rPr>
-              <a:t>•  Silhouette ↑, Davies-Bouldin ↓, Calinski-Harabasz ↑</a:t>
+              <a:t>•  De −1 a 1: más alto es mejor</a:t>
             </a:r>
           </a:p>
           <a:p>
@@ -7941,7 +7941,7 @@
                 </a:solidFill>
                 <a:latin typeface="Calibri"/>
               </a:rPr>
-              <a:t>•  Sólo comparables en el mismo espacio</a:t>
+              <a:t>•  Sólo comparable en el mismo espacio</a:t>
             </a:r>
           </a:p>
           <a:p>
@@ -8083,7 +8083,7 @@
                 </a:solidFill>
                 <a:latin typeface="Calibri"/>
               </a:rPr>
-              <a:t>•  ARI contra una variable que NO usaste</a:t>
+              <a:t>•  Tabla cruzada contra una variable que NO usaste</a:t>
             </a:r>
           </a:p>
           <a:p>
@@ -9036,7 +9036,7 @@
                 </a:solidFill>
                 <a:latin typeface="Calibri"/>
               </a:rPr>
-              <a:t>✓  Compara en el mismo espacio o usa ARI</a:t>
+              <a:t>✓  Compara en el mismo espacio o con una tabla cruzada</a:t>
             </a:r>
           </a:p>
         </p:txBody>
@@ -10633,7 +10633,7 @@
                           </a:solidFill>
                           <a:latin typeface="Calibri"/>
                         </a:rPr>
-                        <a:t>k elegido con varias métricas + negocio; DBSCAN con k-distancia</a:t>
+                        <a:t>k elegido con codo + silhouette + negocio; DBSCAN con k-distancia</a:t>
                       </a:r>
                     </a:p>
                   </a:txBody>
@@ -10701,7 +10701,7 @@
                           </a:solidFill>
                           <a:latin typeface="Calibri"/>
                         </a:rPr>
-                        <a:t>Métricas en el mismo espacio, tabla cruzada y ARI bien interpretados</a:t>
+                        <a:t>Silhouette en el mismo espacio y tabla cruzada contra el canal bien interpretadas</a:t>
                       </a:r>
                     </a:p>
                   </a:txBody>
